--- a/ambulance response time - omir gibreel.pptx
+++ b/ambulance response time - omir gibreel.pptx
@@ -20,6 +20,7 @@
     <p:sldId id="267" r:id="rId11"/>
     <p:sldId id="264" r:id="rId12"/>
     <p:sldId id="265" r:id="rId13"/>
+    <p:sldId id="268" r:id="rId19"/>
   </p:sldIdLst>
   <p:sldSz cx="12192000" cy="6858000"/>
   <p:notesSz cx="6858000" cy="9144000"/>
@@ -6007,7 +6008,7 @@
                 </a:solidFill>
                 <a:latin typeface="Arial"/>
               </a:rPr>
-              <a:t>ملف بيانات التدريب بعشرة آلاف سجل</a:t>
+              <a:t>ملف بيانات التدريب بمئة ألف سجل</a:t>
             </a:r>
           </a:p>
           <a:p>
@@ -6066,6 +6067,230 @@
         <p14:creationId xmlns:p14="http://schemas.microsoft.com/office/powerpoint/2010/main" val="1855842297"/>
       </p:ext>
     </p:extLst>
+  </p:cSld>
+  <p:clrMapOvr>
+    <a:masterClrMapping/>
+  </p:clrMapOvr>
+</p:sld>
+</file>
+
+<file path=ppt/slides/slide13.xml><?xml version="1.0" encoding="utf-8"?>
+<p:sld xmlns:a="http://schemas.openxmlformats.org/drawingml/2006/main" xmlns:r="http://schemas.openxmlformats.org/officeDocument/2006/relationships" xmlns:p="http://schemas.openxmlformats.org/presentationml/2006/main">
+  <p:cSld>
+    <p:bg>
+      <p:bgPr>
+        <a:solidFill>
+          <a:srgbClr val="F8FAFC"/>
+        </a:solidFill>
+        <a:effectLst/>
+      </p:bgPr>
+    </p:bg>
+    <p:spTree>
+      <p:nvGrpSpPr>
+        <p:cNvPr id="1" name=""/>
+        <p:cNvGrpSpPr/>
+        <p:nvPr/>
+      </p:nvGrpSpPr>
+      <p:grpSpPr>
+        <a:xfrm>
+          <a:off x="0" y="0"/>
+          <a:ext cx="0" cy="0"/>
+          <a:chOff x="0" y="0"/>
+          <a:chExt cx="0" cy="0"/>
+        </a:xfrm>
+      </p:grpSpPr>
+      <p:sp>
+        <p:nvSpPr>
+          <p:cNvPr id="2" name="Top Bar"/>
+          <p:cNvSpPr/>
+          <p:nvPr/>
+        </p:nvSpPr>
+        <p:spPr>
+          <a:xfrm>
+            <a:off x="0" y="0"/>
+            <a:ext cx="12192000" cy="164592"/>
+          </a:xfrm>
+          <a:prstGeom prst="rect">
+            <a:avLst/>
+          </a:prstGeom>
+          <a:solidFill>
+            <a:srgbClr val="D97045"/>
+          </a:solidFill>
+          <a:ln>
+            <a:solidFill>
+              <a:srgbClr val="D97045"/>
+            </a:solidFill>
+          </a:ln>
+        </p:spPr>
+        <p:txBody>
+          <a:bodyPr/>
+          <a:lstStyle/>
+          <a:p/>
+        </p:txBody>
+      </p:sp>
+      <p:sp>
+        <p:nvSpPr>
+          <p:cNvPr id="3" name="Title"/>
+          <p:cNvSpPr/>
+          <p:nvPr/>
+        </p:nvSpPr>
+        <p:spPr>
+          <a:xfrm>
+            <a:off x="731520" y="731520"/>
+            <a:ext cx="10728960" cy="731520"/>
+          </a:xfrm>
+        </p:spPr>
+        <p:txBody>
+          <a:bodyPr rtlCol="1" anchor="mid">
+            <a:normAutofit/>
+          </a:bodyPr>
+          <a:lstStyle/>
+          <a:p>
+            <a:pPr algn="r" rtl="1"/>
+            <a:r>
+              <a:rPr lang="ar-SA" sz="3000" b="1">
+                <a:solidFill>
+                  <a:srgbClr val="172033"/>
+                </a:solidFill>
+                <a:latin typeface="Arial"/>
+                <a:cs typeface="Arial"/>
+              </a:rPr>
+              <a:t>رابط تطبيق الويب</a:t>
+            </a:r>
+          </a:p>
+        </p:txBody>
+      </p:sp>
+      <p:sp>
+        <p:nvSpPr>
+          <p:cNvPr id="4" name="Link Box"/>
+          <p:cNvSpPr/>
+          <p:nvPr/>
+        </p:nvSpPr>
+        <p:spPr>
+          <a:xfrm>
+            <a:off x="914400" y="2072640"/>
+            <a:ext cx="10363200" cy="1828800"/>
+          </a:xfrm>
+          <a:prstGeom prst="roundRect">
+            <a:avLst/>
+          </a:prstGeom>
+          <a:solidFill>
+            <a:srgbClr val="FFFFFF"/>
+          </a:solidFill>
+          <a:ln w="12700">
+            <a:solidFill>
+              <a:srgbClr val="CBD5E1"/>
+            </a:solidFill>
+          </a:ln>
+        </p:spPr>
+        <p:txBody>
+          <a:bodyPr rtlCol="1" anchor="mid">
+            <a:normAutofit/>
+          </a:bodyPr>
+          <a:lstStyle/>
+          <a:p>
+            <a:pPr algn="ctr" rtl="1"/>
+            <a:r>
+              <a:rPr lang="ar-SA" sz="2000" b="1">
+                <a:solidFill>
+                  <a:srgbClr val="1F4E79"/>
+                </a:solidFill>
+                <a:latin typeface="Arial"/>
+                <a:cs typeface="Arial"/>
+              </a:rPr>
+              <a:t>بعد النشر اليدوي على Streamlit Community Cloud ضع الرابط النهائي هنا:</a:t>
+            </a:r>
+          </a:p>
+          <a:p>
+            <a:pPr algn="ctr"/>
+            <a:r>
+              <a:rPr lang="en-US" sz="2400" b="1">
+                <a:solidFill>
+                  <a:srgbClr val="0F766E"/>
+                </a:solidFill>
+                <a:latin typeface="Arial"/>
+              </a:rPr>
+              <a:t>https://your-app-name.streamlit.app</a:t>
+            </a:r>
+          </a:p>
+        </p:txBody>
+      </p:sp>
+      <p:sp>
+        <p:nvSpPr>
+          <p:cNvPr id="5" name="Deploy Details"/>
+          <p:cNvSpPr/>
+          <p:nvPr/>
+        </p:nvSpPr>
+        <p:spPr>
+          <a:xfrm>
+            <a:off x="914400" y="4358640"/>
+            <a:ext cx="10363200" cy="1188720"/>
+          </a:xfrm>
+        </p:spPr>
+        <p:txBody>
+          <a:bodyPr rtlCol="1">
+            <a:normAutofit/>
+          </a:bodyPr>
+          <a:lstStyle/>
+          <a:p>
+            <a:pPr algn="r" rtl="1"/>
+            <a:r>
+              <a:rPr lang="ar-SA" sz="1600">
+                <a:solidFill>
+                  <a:srgbClr val="172033"/>
+                </a:solidFill>
+                <a:latin typeface="Arial"/>
+                <a:cs typeface="Arial"/>
+              </a:rPr>
+              <a:t>إعدادات النشر: المستودع على GitHub، الفرع main، وملف التشغيل streamlit_app.py.</a:t>
+            </a:r>
+          </a:p>
+          <a:p>
+            <a:pPr algn="r" rtl="1"/>
+            <a:r>
+              <a:rPr lang="ar-SA" sz="1600">
+                <a:solidFill>
+                  <a:srgbClr val="64748B"/>
+                </a:solidFill>
+                <a:latin typeface="Arial"/>
+                <a:cs typeface="Arial"/>
+              </a:rPr>
+              <a:t>هذه الشريحة مخصصة لوضع الرابط النهائي بعد اكتمال النشر اليدوي.</a:t>
+            </a:r>
+          </a:p>
+        </p:txBody>
+      </p:sp>
+      <p:sp>
+        <p:nvSpPr>
+          <p:cNvPr id="6" name="Footer"/>
+          <p:cNvSpPr/>
+          <p:nvPr/>
+        </p:nvSpPr>
+        <p:spPr>
+          <a:xfrm>
+            <a:off x="457200" y="6516360"/>
+            <a:ext cx="11277600" cy="274320"/>
+          </a:xfrm>
+        </p:spPr>
+        <p:txBody>
+          <a:bodyPr/>
+          <a:lstStyle/>
+          <a:p>
+            <a:pPr algn="l"/>
+            <a:r>
+              <a:rPr lang="ar-SA" sz="900">
+                <a:solidFill>
+                  <a:srgbClr val="64748B"/>
+                </a:solidFill>
+                <a:latin typeface="Arial"/>
+                <a:cs typeface="Arial"/>
+              </a:rPr>
+              <a:t>مشروع تعلم الآلة لتوقع زمن استجابة الإسعاف | رابط التطبيق</a:t>
+            </a:r>
+          </a:p>
+        </p:txBody>
+      </p:sp>
+    </p:spTree>
   </p:cSld>
   <p:clrMapOvr>
     <a:masterClrMapping/>

--- a/ambulance response time - omir gibreel.pptx
+++ b/ambulance response time - omir gibreel.pptx
@@ -6198,19 +6198,20 @@
                 <a:latin typeface="Arial"/>
                 <a:cs typeface="Arial"/>
               </a:rPr>
-              <a:t>بعد النشر اليدوي على Streamlit Community Cloud ضع الرابط النهائي هنا:</a:t>
+              <a:t>رابط التطبيق النهائي على Streamlit Community Cloud:</a:t>
             </a:r>
           </a:p>
           <a:p>
             <a:pPr algn="ctr"/>
             <a:r>
               <a:rPr lang="en-US" sz="2400" b="1">
+                <a:hlinkClick r:id="rId2"/>
                 <a:solidFill>
                   <a:srgbClr val="0F766E"/>
                 </a:solidFill>
                 <a:latin typeface="Arial"/>
               </a:rPr>
-              <a:t>https://your-app-name.streamlit.app</a:t>
+              <a:t>https://ambulance-response-time-ml.streamlit.app/</a:t>
             </a:r>
           </a:p>
         </p:txBody>
@@ -6255,7 +6256,7 @@
                 <a:latin typeface="Arial"/>
                 <a:cs typeface="Arial"/>
               </a:rPr>
-              <a:t>هذه الشريحة مخصصة لوضع الرابط النهائي بعد اكتمال النشر اليدوي.</a:t>
+              <a:t>يمكن فتح التطبيق مباشرة من الرابط أعلاه لتجربة التنبؤات باللغة العربية.</a:t>
             </a:r>
           </a:p>
         </p:txBody>
